--- a/PowerShell for the IT Professional.pptx
+++ b/PowerShell for the IT Professional.pptx
@@ -21,6 +21,14 @@
     <p:sldId id="270" r:id="rId15"/>
     <p:sldId id="271" r:id="rId16"/>
     <p:sldId id="272" r:id="rId17"/>
+    <p:sldId id="273" r:id="rId18"/>
+    <p:sldId id="274" r:id="rId19"/>
+    <p:sldId id="275" r:id="rId20"/>
+    <p:sldId id="276" r:id="rId21"/>
+    <p:sldId id="277" r:id="rId22"/>
+    <p:sldId id="278" r:id="rId23"/>
+    <p:sldId id="279" r:id="rId24"/>
+    <p:sldId id="280" r:id="rId25"/>
   </p:sldIdLst>
   <p:sldSz cx="12192000" cy="6858000"/>
   <p:notesSz cx="6858000" cy="9144000"/>
@@ -140,9 +148,20 @@
             <p14:sldId id="270"/>
             <p14:sldId id="271"/>
             <p14:sldId id="272"/>
+            <p14:sldId id="273"/>
+            <p14:sldId id="274"/>
+            <p14:sldId id="275"/>
+            <p14:sldId id="276"/>
+            <p14:sldId id="277"/>
+            <p14:sldId id="278"/>
+            <p14:sldId id="279"/>
+            <p14:sldId id="280"/>
           </p14:sldIdLst>
         </p14:section>
       </p14:sectionLst>
+    </p:ext>
+    <p:ext uri="{EFAFB233-063F-42B5-8137-9DF3F51BA10A}">
+      <p15:sldGuideLst xmlns:p15="http://schemas.microsoft.com/office/powerpoint/2012/main"/>
     </p:ext>
   </p:extLst>
 </p:presentation>
@@ -480,7 +499,7 @@
             <a:fld id="{B61BEF0D-F0BB-DE4B-95CE-6DB70DBA9567}" type="datetimeFigureOut">
               <a:rPr lang="en-US" dirty="0"/>
               <a:pPr/>
-              <a:t>2/2/2020</a:t>
+              <a:t>2/19/2020</a:t>
             </a:fld>
             <a:endParaRPr lang="en-US" dirty="0"/>
           </a:p>
@@ -801,7 +820,7 @@
             <a:fld id="{B61BEF0D-F0BB-DE4B-95CE-6DB70DBA9567}" type="datetimeFigureOut">
               <a:rPr lang="en-US" dirty="0"/>
               <a:pPr/>
-              <a:t>2/2/2020</a:t>
+              <a:t>2/19/2020</a:t>
             </a:fld>
             <a:endParaRPr lang="en-US" dirty="0"/>
           </a:p>
@@ -1046,7 +1065,7 @@
             <a:fld id="{B61BEF0D-F0BB-DE4B-95CE-6DB70DBA9567}" type="datetimeFigureOut">
               <a:rPr lang="en-US" dirty="0"/>
               <a:pPr/>
-              <a:t>2/2/2020</a:t>
+              <a:t>2/19/2020</a:t>
             </a:fld>
             <a:endParaRPr lang="en-US" dirty="0"/>
           </a:p>
@@ -1382,7 +1401,7 @@
             <a:fld id="{B61BEF0D-F0BB-DE4B-95CE-6DB70DBA9567}" type="datetimeFigureOut">
               <a:rPr lang="en-US" dirty="0"/>
               <a:pPr/>
-              <a:t>2/2/2020</a:t>
+              <a:t>2/19/2020</a:t>
             </a:fld>
             <a:endParaRPr lang="en-US" dirty="0"/>
           </a:p>
@@ -1726,7 +1745,7 @@
             <a:fld id="{B61BEF0D-F0BB-DE4B-95CE-6DB70DBA9567}" type="datetimeFigureOut">
               <a:rPr lang="en-US" dirty="0"/>
               <a:pPr/>
-              <a:t>2/2/2020</a:t>
+              <a:t>2/19/2020</a:t>
             </a:fld>
             <a:endParaRPr lang="en-US" dirty="0"/>
           </a:p>
@@ -2097,7 +2116,7 @@
             <a:fld id="{B61BEF0D-F0BB-DE4B-95CE-6DB70DBA9567}" type="datetimeFigureOut">
               <a:rPr lang="en-US" dirty="0"/>
               <a:pPr/>
-              <a:t>2/2/2020</a:t>
+              <a:t>2/19/2020</a:t>
             </a:fld>
             <a:endParaRPr lang="en-US" dirty="0"/>
           </a:p>
@@ -2564,7 +2583,7 @@
             <a:fld id="{B61BEF0D-F0BB-DE4B-95CE-6DB70DBA9567}" type="datetimeFigureOut">
               <a:rPr lang="en-US" dirty="0"/>
               <a:pPr/>
-              <a:t>2/2/2020</a:t>
+              <a:t>2/19/2020</a:t>
             </a:fld>
             <a:endParaRPr lang="en-US" dirty="0"/>
           </a:p>
@@ -2766,7 +2785,7 @@
             <a:fld id="{B61BEF0D-F0BB-DE4B-95CE-6DB70DBA9567}" type="datetimeFigureOut">
               <a:rPr lang="en-US" dirty="0"/>
               <a:pPr/>
-              <a:t>2/2/2020</a:t>
+              <a:t>2/19/2020</a:t>
             </a:fld>
             <a:endParaRPr lang="en-US" dirty="0"/>
           </a:p>
@@ -2974,7 +2993,7 @@
             <a:fld id="{B61BEF0D-F0BB-DE4B-95CE-6DB70DBA9567}" type="datetimeFigureOut">
               <a:rPr lang="en-US" dirty="0"/>
               <a:pPr/>
-              <a:t>2/2/2020</a:t>
+              <a:t>2/19/2020</a:t>
             </a:fld>
             <a:endParaRPr lang="en-US" dirty="0"/>
           </a:p>
@@ -3202,7 +3221,7 @@
           <a:p>
             <a:fld id="{52647F38-B617-4D2F-AE0A-013F0C4D2C57}" type="datetimeFigureOut">
               <a:rPr lang="en-US" dirty="0"/>
-              <a:t>2/2/2020</a:t>
+              <a:t>2/19/2020</a:t>
             </a:fld>
             <a:endParaRPr lang="en-US" dirty="0"/>
           </a:p>
@@ -3446,7 +3465,7 @@
             <a:fld id="{B61BEF0D-F0BB-DE4B-95CE-6DB70DBA9567}" type="datetimeFigureOut">
               <a:rPr lang="en-US" dirty="0"/>
               <a:pPr/>
-              <a:t>2/2/2020</a:t>
+              <a:t>2/19/2020</a:t>
             </a:fld>
             <a:endParaRPr lang="en-US" dirty="0"/>
           </a:p>
@@ -3740,7 +3759,7 @@
           <a:p>
             <a:fld id="{05BFA754-D5C3-4E66-96A6-867B257F58DC}" type="datetimeFigureOut">
               <a:rPr lang="en-US" dirty="0"/>
-              <a:t>2/2/2020</a:t>
+              <a:t>2/19/2020</a:t>
             </a:fld>
             <a:endParaRPr lang="en-US" dirty="0"/>
           </a:p>
@@ -4130,7 +4149,7 @@
             <a:fld id="{B61BEF0D-F0BB-DE4B-95CE-6DB70DBA9567}" type="datetimeFigureOut">
               <a:rPr lang="en-US" dirty="0"/>
               <a:pPr/>
-              <a:t>2/2/2020</a:t>
+              <a:t>2/19/2020</a:t>
             </a:fld>
             <a:endParaRPr lang="en-US" dirty="0"/>
           </a:p>
@@ -4276,7 +4295,7 @@
             <a:fld id="{B61BEF0D-F0BB-DE4B-95CE-6DB70DBA9567}" type="datetimeFigureOut">
               <a:rPr lang="en-US" dirty="0"/>
               <a:pPr/>
-              <a:t>2/2/2020</a:t>
+              <a:t>2/19/2020</a:t>
             </a:fld>
             <a:endParaRPr lang="en-US" dirty="0"/>
           </a:p>
@@ -4399,7 +4418,7 @@
             <a:fld id="{B61BEF0D-F0BB-DE4B-95CE-6DB70DBA9567}" type="datetimeFigureOut">
               <a:rPr lang="en-US" dirty="0"/>
               <a:pPr/>
-              <a:t>2/2/2020</a:t>
+              <a:t>2/19/2020</a:t>
             </a:fld>
             <a:endParaRPr lang="en-US" dirty="0"/>
           </a:p>
@@ -4651,7 +4670,7 @@
             <a:fld id="{B61BEF0D-F0BB-DE4B-95CE-6DB70DBA9567}" type="datetimeFigureOut">
               <a:rPr lang="en-US" dirty="0"/>
               <a:pPr/>
-              <a:t>2/2/2020</a:t>
+              <a:t>2/19/2020</a:t>
             </a:fld>
             <a:endParaRPr lang="en-US" dirty="0"/>
           </a:p>
@@ -4963,7 +4982,7 @@
             <a:fld id="{B61BEF0D-F0BB-DE4B-95CE-6DB70DBA9567}" type="datetimeFigureOut">
               <a:rPr lang="en-US" dirty="0"/>
               <a:pPr/>
-              <a:t>2/2/2020</a:t>
+              <a:t>2/19/2020</a:t>
             </a:fld>
             <a:endParaRPr lang="en-US" dirty="0"/>
           </a:p>
@@ -5311,7 +5330,7 @@
             <a:fld id="{B61BEF0D-F0BB-DE4B-95CE-6DB70DBA9567}" type="datetimeFigureOut">
               <a:rPr lang="en-US" dirty="0"/>
               <a:pPr/>
-              <a:t>2/2/2020</a:t>
+              <a:t>2/19/2020</a:t>
             </a:fld>
             <a:endParaRPr lang="en-US" dirty="0"/>
           </a:p>
@@ -6602,6 +6621,326 @@
 </p:sld>
 </file>
 
+<file path=ppt/slides/slide17.xml><?xml version="1.0" encoding="utf-8"?>
+<p:sld xmlns:a="http://schemas.openxmlformats.org/drawingml/2006/main" xmlns:r="http://schemas.openxmlformats.org/officeDocument/2006/relationships" xmlns:p="http://schemas.openxmlformats.org/presentationml/2006/main">
+  <p:cSld>
+    <p:spTree>
+      <p:nvGrpSpPr>
+        <p:cNvPr id="1" name=""/>
+        <p:cNvGrpSpPr/>
+        <p:nvPr/>
+      </p:nvGrpSpPr>
+      <p:grpSpPr>
+        <a:xfrm>
+          <a:off x="0" y="0"/>
+          <a:ext cx="0" cy="0"/>
+          <a:chOff x="0" y="0"/>
+          <a:chExt cx="0" cy="0"/>
+        </a:xfrm>
+      </p:grpSpPr>
+      <p:sp>
+        <p:nvSpPr>
+          <p:cNvPr id="4" name="Title 3"/>
+          <p:cNvSpPr>
+            <a:spLocks noGrp="1"/>
+          </p:cNvSpPr>
+          <p:nvPr>
+            <p:ph type="title"/>
+          </p:nvPr>
+        </p:nvSpPr>
+        <p:spPr>
+          <a:xfrm>
+            <a:off x="2015069" y="1719354"/>
+            <a:ext cx="8158688" cy="1822514"/>
+          </a:xfrm>
+        </p:spPr>
+        <p:txBody>
+          <a:bodyPr/>
+          <a:lstStyle/>
+          <a:p>
+            <a:r>
+              <a:rPr lang="en-US" dirty="0" smtClean="0"/>
+              <a:t>Pipeline</a:t>
+            </a:r>
+            <a:endParaRPr lang="he-IL" dirty="0"/>
+          </a:p>
+        </p:txBody>
+      </p:sp>
+      <p:sp>
+        <p:nvSpPr>
+          <p:cNvPr id="5" name="Text Placeholder 4"/>
+          <p:cNvSpPr>
+            <a:spLocks noGrp="1"/>
+          </p:cNvSpPr>
+          <p:nvPr>
+            <p:ph type="body" idx="1"/>
+          </p:nvPr>
+        </p:nvSpPr>
+        <p:spPr>
+          <a:xfrm>
+            <a:off x="2015067" y="3812799"/>
+            <a:ext cx="8158690" cy="1889731"/>
+          </a:xfrm>
+        </p:spPr>
+        <p:txBody>
+          <a:bodyPr>
+            <a:normAutofit/>
+          </a:bodyPr>
+          <a:lstStyle/>
+          <a:p>
+            <a:pPr marL="342900" indent="-342900" algn="l" rtl="0">
+              <a:buFont typeface="Arial" panose="020B0604020202020204" pitchFamily="34" charset="0"/>
+              <a:buChar char="•"/>
+            </a:pPr>
+            <a:r>
+              <a:rPr lang="en-US" dirty="0" smtClean="0"/>
+              <a:t>Pipeline Input</a:t>
+            </a:r>
+          </a:p>
+          <a:p>
+            <a:pPr marL="342900" indent="-342900" algn="l" rtl="0">
+              <a:buFont typeface="Arial" panose="020B0604020202020204" pitchFamily="34" charset="0"/>
+              <a:buChar char="•"/>
+            </a:pPr>
+            <a:r>
+              <a:rPr lang="en-US" dirty="0" smtClean="0"/>
+              <a:t>Pipeline Object Manipulation</a:t>
+            </a:r>
+          </a:p>
+          <a:p>
+            <a:pPr marL="342900" indent="-342900" algn="l" rtl="0">
+              <a:buFont typeface="Arial" panose="020B0604020202020204" pitchFamily="34" charset="0"/>
+              <a:buChar char="•"/>
+            </a:pPr>
+            <a:r>
+              <a:rPr lang="en-US" dirty="0" smtClean="0"/>
+              <a:t>Pipeline Output</a:t>
+            </a:r>
+          </a:p>
+          <a:p>
+            <a:pPr marL="342900" indent="-342900" algn="l" rtl="0">
+              <a:buFont typeface="Arial" panose="020B0604020202020204" pitchFamily="34" charset="0"/>
+              <a:buChar char="•"/>
+            </a:pPr>
+            <a:endParaRPr lang="he-IL" dirty="0"/>
+          </a:p>
+        </p:txBody>
+      </p:sp>
+    </p:spTree>
+    <p:extLst>
+      <p:ext uri="{BB962C8B-B14F-4D97-AF65-F5344CB8AC3E}">
+        <p14:creationId xmlns:p14="http://schemas.microsoft.com/office/powerpoint/2010/main" val="2629176084"/>
+      </p:ext>
+    </p:extLst>
+  </p:cSld>
+  <p:clrMapOvr>
+    <a:masterClrMapping/>
+  </p:clrMapOvr>
+</p:sld>
+</file>
+
+<file path=ppt/slides/slide18.xml><?xml version="1.0" encoding="utf-8"?>
+<p:sld xmlns:a="http://schemas.openxmlformats.org/drawingml/2006/main" xmlns:r="http://schemas.openxmlformats.org/officeDocument/2006/relationships" xmlns:p="http://schemas.openxmlformats.org/presentationml/2006/main">
+  <p:cSld>
+    <p:spTree>
+      <p:nvGrpSpPr>
+        <p:cNvPr id="1" name=""/>
+        <p:cNvGrpSpPr/>
+        <p:nvPr/>
+      </p:nvGrpSpPr>
+      <p:grpSpPr>
+        <a:xfrm>
+          <a:off x="0" y="0"/>
+          <a:ext cx="0" cy="0"/>
+          <a:chOff x="0" y="0"/>
+          <a:chExt cx="0" cy="0"/>
+        </a:xfrm>
+      </p:grpSpPr>
+      <p:sp>
+        <p:nvSpPr>
+          <p:cNvPr id="4" name="Title 3"/>
+          <p:cNvSpPr>
+            <a:spLocks noGrp="1"/>
+          </p:cNvSpPr>
+          <p:nvPr>
+            <p:ph type="title"/>
+          </p:nvPr>
+        </p:nvSpPr>
+        <p:spPr/>
+        <p:txBody>
+          <a:bodyPr/>
+          <a:lstStyle/>
+          <a:p>
+            <a:r>
+              <a:rPr lang="en-US" dirty="0" smtClean="0"/>
+              <a:t>Pipeline Input</a:t>
+            </a:r>
+            <a:endParaRPr lang="he-IL" dirty="0"/>
+          </a:p>
+        </p:txBody>
+      </p:sp>
+      <p:sp>
+        <p:nvSpPr>
+          <p:cNvPr id="5" name="Content Placeholder 4"/>
+          <p:cNvSpPr>
+            <a:spLocks noGrp="1"/>
+          </p:cNvSpPr>
+          <p:nvPr>
+            <p:ph idx="1"/>
+          </p:nvPr>
+        </p:nvSpPr>
+        <p:spPr/>
+        <p:txBody>
+          <a:bodyPr/>
+          <a:lstStyle/>
+          <a:p>
+            <a:pPr algn="l" rtl="0"/>
+            <a:r>
+              <a:rPr lang="en-US" dirty="0" smtClean="0"/>
+              <a:t>Input from External Commands</a:t>
+            </a:r>
+          </a:p>
+          <a:p>
+            <a:pPr algn="l" rtl="0"/>
+            <a:r>
+              <a:rPr lang="en-US" dirty="0" smtClean="0"/>
+              <a:t>Input from Cmdlets</a:t>
+            </a:r>
+          </a:p>
+          <a:p>
+            <a:pPr algn="l" rtl="0"/>
+            <a:r>
+              <a:rPr lang="en-US" dirty="0" smtClean="0"/>
+              <a:t>Input from Text Files</a:t>
+            </a:r>
+            <a:endParaRPr lang="he-IL" dirty="0"/>
+          </a:p>
+        </p:txBody>
+      </p:sp>
+    </p:spTree>
+    <p:extLst>
+      <p:ext uri="{BB962C8B-B14F-4D97-AF65-F5344CB8AC3E}">
+        <p14:creationId xmlns:p14="http://schemas.microsoft.com/office/powerpoint/2010/main" val="3589768433"/>
+      </p:ext>
+    </p:extLst>
+  </p:cSld>
+  <p:clrMapOvr>
+    <a:masterClrMapping/>
+  </p:clrMapOvr>
+</p:sld>
+</file>
+
+<file path=ppt/slides/slide19.xml><?xml version="1.0" encoding="utf-8"?>
+<p:sld xmlns:a="http://schemas.openxmlformats.org/drawingml/2006/main" xmlns:r="http://schemas.openxmlformats.org/officeDocument/2006/relationships" xmlns:p="http://schemas.openxmlformats.org/presentationml/2006/main">
+  <p:cSld>
+    <p:spTree>
+      <p:nvGrpSpPr>
+        <p:cNvPr id="1" name=""/>
+        <p:cNvGrpSpPr/>
+        <p:nvPr/>
+      </p:nvGrpSpPr>
+      <p:grpSpPr>
+        <a:xfrm>
+          <a:off x="0" y="0"/>
+          <a:ext cx="0" cy="0"/>
+          <a:chOff x="0" y="0"/>
+          <a:chExt cx="0" cy="0"/>
+        </a:xfrm>
+      </p:grpSpPr>
+      <p:sp>
+        <p:nvSpPr>
+          <p:cNvPr id="2" name="Title 1"/>
+          <p:cNvSpPr>
+            <a:spLocks noGrp="1"/>
+          </p:cNvSpPr>
+          <p:nvPr>
+            <p:ph type="title"/>
+          </p:nvPr>
+        </p:nvSpPr>
+        <p:spPr/>
+        <p:txBody>
+          <a:bodyPr>
+            <a:normAutofit/>
+          </a:bodyPr>
+          <a:lstStyle/>
+          <a:p>
+            <a:r>
+              <a:rPr lang="en-US" dirty="0"/>
+              <a:t>Pipeline Object </a:t>
+            </a:r>
+            <a:r>
+              <a:rPr lang="en-US" dirty="0" smtClean="0"/>
+              <a:t>Manipulation</a:t>
+            </a:r>
+            <a:endParaRPr lang="he-IL" dirty="0"/>
+          </a:p>
+        </p:txBody>
+      </p:sp>
+      <p:sp>
+        <p:nvSpPr>
+          <p:cNvPr id="3" name="Content Placeholder 2"/>
+          <p:cNvSpPr>
+            <a:spLocks noGrp="1"/>
+          </p:cNvSpPr>
+          <p:nvPr>
+            <p:ph idx="1"/>
+          </p:nvPr>
+        </p:nvSpPr>
+        <p:spPr/>
+        <p:txBody>
+          <a:bodyPr/>
+          <a:lstStyle/>
+          <a:p>
+            <a:pPr algn="l" rtl="0"/>
+            <a:r>
+              <a:rPr lang="en-US" dirty="0" smtClean="0"/>
+              <a:t>Sort-Object</a:t>
+            </a:r>
+          </a:p>
+          <a:p>
+            <a:pPr algn="l" rtl="0"/>
+            <a:r>
+              <a:rPr lang="en-US" dirty="0" smtClean="0"/>
+              <a:t>Select-Object</a:t>
+            </a:r>
+          </a:p>
+          <a:p>
+            <a:pPr algn="l" rtl="0"/>
+            <a:r>
+              <a:rPr lang="en-US" dirty="0" smtClean="0"/>
+              <a:t>Group-Object</a:t>
+            </a:r>
+          </a:p>
+          <a:p>
+            <a:pPr algn="l" rtl="0"/>
+            <a:r>
+              <a:rPr lang="en-US" dirty="0" smtClean="0"/>
+              <a:t>Measure-Object</a:t>
+            </a:r>
+          </a:p>
+          <a:p>
+            <a:pPr algn="l" rtl="0"/>
+            <a:r>
+              <a:rPr lang="en-US" dirty="0" smtClean="0"/>
+              <a:t>Compare-Object</a:t>
+            </a:r>
+            <a:endParaRPr lang="he-IL" dirty="0"/>
+          </a:p>
+        </p:txBody>
+      </p:sp>
+    </p:spTree>
+    <p:extLst>
+      <p:ext uri="{BB962C8B-B14F-4D97-AF65-F5344CB8AC3E}">
+        <p14:creationId xmlns:p14="http://schemas.microsoft.com/office/powerpoint/2010/main" val="2169900211"/>
+      </p:ext>
+    </p:extLst>
+  </p:cSld>
+  <p:clrMapOvr>
+    <a:masterClrMapping/>
+  </p:clrMapOvr>
+</p:sld>
+</file>
+
 <file path=ppt/slides/slide2.xml><?xml version="1.0" encoding="utf-8"?>
 <p:sld xmlns:a="http://schemas.openxmlformats.org/drawingml/2006/main" xmlns:r="http://schemas.openxmlformats.org/officeDocument/2006/relationships" xmlns:p="http://schemas.openxmlformats.org/presentationml/2006/main">
   <p:cSld>
@@ -6699,6 +7038,453 @@
     <p:extLst>
       <p:ext uri="{BB962C8B-B14F-4D97-AF65-F5344CB8AC3E}">
         <p14:creationId xmlns:p14="http://schemas.microsoft.com/office/powerpoint/2010/main" val="2714760789"/>
+      </p:ext>
+    </p:extLst>
+  </p:cSld>
+  <p:clrMapOvr>
+    <a:masterClrMapping/>
+  </p:clrMapOvr>
+</p:sld>
+</file>
+
+<file path=ppt/slides/slide20.xml><?xml version="1.0" encoding="utf-8"?>
+<p:sld xmlns:a="http://schemas.openxmlformats.org/drawingml/2006/main" xmlns:r="http://schemas.openxmlformats.org/officeDocument/2006/relationships" xmlns:p="http://schemas.openxmlformats.org/presentationml/2006/main">
+  <p:cSld>
+    <p:spTree>
+      <p:nvGrpSpPr>
+        <p:cNvPr id="1" name=""/>
+        <p:cNvGrpSpPr/>
+        <p:nvPr/>
+      </p:nvGrpSpPr>
+      <p:grpSpPr>
+        <a:xfrm>
+          <a:off x="0" y="0"/>
+          <a:ext cx="0" cy="0"/>
+          <a:chOff x="0" y="0"/>
+          <a:chExt cx="0" cy="0"/>
+        </a:xfrm>
+      </p:grpSpPr>
+      <p:sp>
+        <p:nvSpPr>
+          <p:cNvPr id="2" name="Title 1"/>
+          <p:cNvSpPr>
+            <a:spLocks noGrp="1"/>
+          </p:cNvSpPr>
+          <p:nvPr>
+            <p:ph type="title"/>
+          </p:nvPr>
+        </p:nvSpPr>
+        <p:spPr/>
+        <p:txBody>
+          <a:bodyPr>
+            <a:normAutofit/>
+          </a:bodyPr>
+          <a:lstStyle/>
+          <a:p>
+            <a:r>
+              <a:rPr lang="en-US" dirty="0"/>
+              <a:t>Pipeline </a:t>
+            </a:r>
+            <a:r>
+              <a:rPr lang="en-US" dirty="0" smtClean="0"/>
+              <a:t>Output - Format</a:t>
+            </a:r>
+            <a:endParaRPr lang="he-IL" dirty="0"/>
+          </a:p>
+        </p:txBody>
+      </p:sp>
+      <p:sp>
+        <p:nvSpPr>
+          <p:cNvPr id="3" name="Content Placeholder 2"/>
+          <p:cNvSpPr>
+            <a:spLocks noGrp="1"/>
+          </p:cNvSpPr>
+          <p:nvPr>
+            <p:ph idx="1"/>
+          </p:nvPr>
+        </p:nvSpPr>
+        <p:spPr/>
+        <p:txBody>
+          <a:bodyPr/>
+          <a:lstStyle/>
+          <a:p>
+            <a:pPr algn="l" rtl="0"/>
+            <a:r>
+              <a:rPr lang="en-US" dirty="0" smtClean="0"/>
+              <a:t>Format-List</a:t>
+            </a:r>
+          </a:p>
+          <a:p>
+            <a:pPr algn="l" rtl="0"/>
+            <a:r>
+              <a:rPr lang="en-US" dirty="0" smtClean="0"/>
+              <a:t>Format-Table</a:t>
+            </a:r>
+          </a:p>
+          <a:p>
+            <a:pPr algn="l" rtl="0"/>
+            <a:r>
+              <a:rPr lang="en-US" dirty="0" smtClean="0"/>
+              <a:t>Format-Wide</a:t>
+            </a:r>
+            <a:endParaRPr lang="he-IL" dirty="0"/>
+          </a:p>
+        </p:txBody>
+      </p:sp>
+    </p:spTree>
+    <p:extLst>
+      <p:ext uri="{BB962C8B-B14F-4D97-AF65-F5344CB8AC3E}">
+        <p14:creationId xmlns:p14="http://schemas.microsoft.com/office/powerpoint/2010/main" val="382923862"/>
+      </p:ext>
+    </p:extLst>
+  </p:cSld>
+  <p:clrMapOvr>
+    <a:masterClrMapping/>
+  </p:clrMapOvr>
+</p:sld>
+</file>
+
+<file path=ppt/slides/slide21.xml><?xml version="1.0" encoding="utf-8"?>
+<p:sld xmlns:a="http://schemas.openxmlformats.org/drawingml/2006/main" xmlns:r="http://schemas.openxmlformats.org/officeDocument/2006/relationships" xmlns:p="http://schemas.openxmlformats.org/presentationml/2006/main">
+  <p:cSld>
+    <p:spTree>
+      <p:nvGrpSpPr>
+        <p:cNvPr id="1" name=""/>
+        <p:cNvGrpSpPr/>
+        <p:nvPr/>
+      </p:nvGrpSpPr>
+      <p:grpSpPr>
+        <a:xfrm>
+          <a:off x="0" y="0"/>
+          <a:ext cx="0" cy="0"/>
+          <a:chOff x="0" y="0"/>
+          <a:chExt cx="0" cy="0"/>
+        </a:xfrm>
+      </p:grpSpPr>
+      <p:sp>
+        <p:nvSpPr>
+          <p:cNvPr id="2" name="Title 1"/>
+          <p:cNvSpPr>
+            <a:spLocks noGrp="1"/>
+          </p:cNvSpPr>
+          <p:nvPr>
+            <p:ph type="title"/>
+          </p:nvPr>
+        </p:nvSpPr>
+        <p:spPr/>
+        <p:txBody>
+          <a:bodyPr/>
+          <a:lstStyle/>
+          <a:p>
+            <a:r>
+              <a:rPr lang="en-US" dirty="0" smtClean="0"/>
+              <a:t>Pipeline Output – Export/Import</a:t>
+            </a:r>
+            <a:endParaRPr lang="he-IL" dirty="0"/>
+          </a:p>
+        </p:txBody>
+      </p:sp>
+      <p:sp>
+        <p:nvSpPr>
+          <p:cNvPr id="3" name="Content Placeholder 2"/>
+          <p:cNvSpPr>
+            <a:spLocks noGrp="1"/>
+          </p:cNvSpPr>
+          <p:nvPr>
+            <p:ph idx="1"/>
+          </p:nvPr>
+        </p:nvSpPr>
+        <p:spPr/>
+        <p:txBody>
+          <a:bodyPr/>
+          <a:lstStyle/>
+          <a:p>
+            <a:pPr algn="l" rtl="0"/>
+            <a:r>
+              <a:rPr lang="en-US" dirty="0" smtClean="0"/>
+              <a:t>Export-Csv</a:t>
+            </a:r>
+          </a:p>
+          <a:p>
+            <a:pPr algn="l" rtl="0"/>
+            <a:r>
+              <a:rPr lang="en-US" dirty="0" smtClean="0"/>
+              <a:t>Export-</a:t>
+            </a:r>
+            <a:r>
+              <a:rPr lang="en-US" dirty="0" err="1" smtClean="0"/>
+              <a:t>Clixml</a:t>
+            </a:r>
+            <a:endParaRPr lang="he-IL" dirty="0"/>
+          </a:p>
+        </p:txBody>
+      </p:sp>
+    </p:spTree>
+    <p:extLst>
+      <p:ext uri="{BB962C8B-B14F-4D97-AF65-F5344CB8AC3E}">
+        <p14:creationId xmlns:p14="http://schemas.microsoft.com/office/powerpoint/2010/main" val="3281894127"/>
+      </p:ext>
+    </p:extLst>
+  </p:cSld>
+  <p:clrMapOvr>
+    <a:masterClrMapping/>
+  </p:clrMapOvr>
+</p:sld>
+</file>
+
+<file path=ppt/slides/slide22.xml><?xml version="1.0" encoding="utf-8"?>
+<p:sld xmlns:a="http://schemas.openxmlformats.org/drawingml/2006/main" xmlns:r="http://schemas.openxmlformats.org/officeDocument/2006/relationships" xmlns:p="http://schemas.openxmlformats.org/presentationml/2006/main">
+  <p:cSld>
+    <p:spTree>
+      <p:nvGrpSpPr>
+        <p:cNvPr id="1" name=""/>
+        <p:cNvGrpSpPr/>
+        <p:nvPr/>
+      </p:nvGrpSpPr>
+      <p:grpSpPr>
+        <a:xfrm>
+          <a:off x="0" y="0"/>
+          <a:ext cx="0" cy="0"/>
+          <a:chOff x="0" y="0"/>
+          <a:chExt cx="0" cy="0"/>
+        </a:xfrm>
+      </p:grpSpPr>
+      <p:sp>
+        <p:nvSpPr>
+          <p:cNvPr id="2" name="Title 1"/>
+          <p:cNvSpPr>
+            <a:spLocks noGrp="1"/>
+          </p:cNvSpPr>
+          <p:nvPr>
+            <p:ph type="title"/>
+          </p:nvPr>
+        </p:nvSpPr>
+        <p:spPr/>
+        <p:txBody>
+          <a:bodyPr/>
+          <a:lstStyle/>
+          <a:p>
+            <a:pPr rtl="0"/>
+            <a:r>
+              <a:rPr lang="en-US" dirty="0" smtClean="0"/>
+              <a:t>Pipeline Output – Out Cmdlets</a:t>
+            </a:r>
+            <a:endParaRPr lang="he-IL" dirty="0"/>
+          </a:p>
+        </p:txBody>
+      </p:sp>
+      <p:sp>
+        <p:nvSpPr>
+          <p:cNvPr id="3" name="Content Placeholder 2"/>
+          <p:cNvSpPr>
+            <a:spLocks noGrp="1"/>
+          </p:cNvSpPr>
+          <p:nvPr>
+            <p:ph idx="1"/>
+          </p:nvPr>
+        </p:nvSpPr>
+        <p:spPr/>
+        <p:txBody>
+          <a:bodyPr/>
+          <a:lstStyle/>
+          <a:p>
+            <a:pPr algn="l" rtl="0"/>
+            <a:r>
+              <a:rPr lang="en-US" dirty="0" smtClean="0"/>
+              <a:t>Out-Default</a:t>
+            </a:r>
+          </a:p>
+          <a:p>
+            <a:pPr algn="l" rtl="0"/>
+            <a:r>
+              <a:rPr lang="en-US" dirty="0" smtClean="0"/>
+              <a:t>Out-File</a:t>
+            </a:r>
+          </a:p>
+          <a:p>
+            <a:pPr algn="l" rtl="0"/>
+            <a:r>
+              <a:rPr lang="en-US" dirty="0" smtClean="0"/>
+              <a:t>Out-</a:t>
+            </a:r>
+            <a:r>
+              <a:rPr lang="en-US" dirty="0" err="1" smtClean="0"/>
+              <a:t>GridView</a:t>
+            </a:r>
+            <a:endParaRPr lang="en-US" dirty="0" smtClean="0"/>
+          </a:p>
+          <a:p>
+            <a:pPr algn="l" rtl="0"/>
+            <a:r>
+              <a:rPr lang="en-US" dirty="0" smtClean="0"/>
+              <a:t>Out-Host</a:t>
+            </a:r>
+          </a:p>
+          <a:p>
+            <a:pPr algn="l" rtl="0"/>
+            <a:r>
+              <a:rPr lang="en-US" dirty="0" smtClean="0"/>
+              <a:t>Out-Null</a:t>
+            </a:r>
+          </a:p>
+          <a:p>
+            <a:pPr algn="l" rtl="0"/>
+            <a:r>
+              <a:rPr lang="en-US" dirty="0" smtClean="0"/>
+              <a:t>Out-String</a:t>
+            </a:r>
+            <a:endParaRPr lang="he-IL" dirty="0"/>
+          </a:p>
+        </p:txBody>
+      </p:sp>
+    </p:spTree>
+    <p:extLst>
+      <p:ext uri="{BB962C8B-B14F-4D97-AF65-F5344CB8AC3E}">
+        <p14:creationId xmlns:p14="http://schemas.microsoft.com/office/powerpoint/2010/main" val="4148073865"/>
+      </p:ext>
+    </p:extLst>
+  </p:cSld>
+  <p:clrMapOvr>
+    <a:masterClrMapping/>
+  </p:clrMapOvr>
+</p:sld>
+</file>
+
+<file path=ppt/slides/slide23.xml><?xml version="1.0" encoding="utf-8"?>
+<p:sld xmlns:a="http://schemas.openxmlformats.org/drawingml/2006/main" xmlns:r="http://schemas.openxmlformats.org/officeDocument/2006/relationships" xmlns:p="http://schemas.openxmlformats.org/presentationml/2006/main">
+  <p:cSld>
+    <p:spTree>
+      <p:nvGrpSpPr>
+        <p:cNvPr id="1" name=""/>
+        <p:cNvGrpSpPr/>
+        <p:nvPr/>
+      </p:nvGrpSpPr>
+      <p:grpSpPr>
+        <a:xfrm>
+          <a:off x="0" y="0"/>
+          <a:ext cx="0" cy="0"/>
+          <a:chOff x="0" y="0"/>
+          <a:chExt cx="0" cy="0"/>
+        </a:xfrm>
+      </p:grpSpPr>
+      <p:sp>
+        <p:nvSpPr>
+          <p:cNvPr id="4" name="Title 3"/>
+          <p:cNvSpPr>
+            <a:spLocks noGrp="1"/>
+          </p:cNvSpPr>
+          <p:nvPr>
+            <p:ph type="title"/>
+          </p:nvPr>
+        </p:nvSpPr>
+        <p:spPr/>
+        <p:txBody>
+          <a:bodyPr/>
+          <a:lstStyle/>
+          <a:p>
+            <a:r>
+              <a:rPr lang="en-US" dirty="0" smtClean="0"/>
+              <a:t>Script Blocks</a:t>
+            </a:r>
+            <a:endParaRPr lang="he-IL" dirty="0"/>
+          </a:p>
+        </p:txBody>
+      </p:sp>
+      <p:sp>
+        <p:nvSpPr>
+          <p:cNvPr id="5" name="Text Placeholder 4"/>
+          <p:cNvSpPr>
+            <a:spLocks noGrp="1"/>
+          </p:cNvSpPr>
+          <p:nvPr>
+            <p:ph type="body" idx="1"/>
+          </p:nvPr>
+        </p:nvSpPr>
+        <p:spPr/>
+        <p:txBody>
+          <a:bodyPr/>
+          <a:lstStyle/>
+          <a:p>
+            <a:endParaRPr lang="he-IL"/>
+          </a:p>
+        </p:txBody>
+      </p:sp>
+    </p:spTree>
+    <p:extLst>
+      <p:ext uri="{BB962C8B-B14F-4D97-AF65-F5344CB8AC3E}">
+        <p14:creationId xmlns:p14="http://schemas.microsoft.com/office/powerpoint/2010/main" val="2492794513"/>
+      </p:ext>
+    </p:extLst>
+  </p:cSld>
+  <p:clrMapOvr>
+    <a:masterClrMapping/>
+  </p:clrMapOvr>
+</p:sld>
+</file>
+
+<file path=ppt/slides/slide24.xml><?xml version="1.0" encoding="utf-8"?>
+<p:sld xmlns:a="http://schemas.openxmlformats.org/drawingml/2006/main" xmlns:r="http://schemas.openxmlformats.org/officeDocument/2006/relationships" xmlns:p="http://schemas.openxmlformats.org/presentationml/2006/main">
+  <p:cSld>
+    <p:spTree>
+      <p:nvGrpSpPr>
+        <p:cNvPr id="1" name=""/>
+        <p:cNvGrpSpPr/>
+        <p:nvPr/>
+      </p:nvGrpSpPr>
+      <p:grpSpPr>
+        <a:xfrm>
+          <a:off x="0" y="0"/>
+          <a:ext cx="0" cy="0"/>
+          <a:chOff x="0" y="0"/>
+          <a:chExt cx="0" cy="0"/>
+        </a:xfrm>
+      </p:grpSpPr>
+      <p:sp>
+        <p:nvSpPr>
+          <p:cNvPr id="2" name="Title 1"/>
+          <p:cNvSpPr>
+            <a:spLocks noGrp="1"/>
+          </p:cNvSpPr>
+          <p:nvPr>
+            <p:ph type="title"/>
+          </p:nvPr>
+        </p:nvSpPr>
+        <p:spPr/>
+        <p:txBody>
+          <a:bodyPr/>
+          <a:lstStyle/>
+          <a:p>
+            <a:r>
+              <a:rPr lang="en-US" dirty="0" smtClean="0"/>
+              <a:t>Functions</a:t>
+            </a:r>
+            <a:endParaRPr lang="he-IL" dirty="0"/>
+          </a:p>
+        </p:txBody>
+      </p:sp>
+      <p:sp>
+        <p:nvSpPr>
+          <p:cNvPr id="3" name="Text Placeholder 2"/>
+          <p:cNvSpPr>
+            <a:spLocks noGrp="1"/>
+          </p:cNvSpPr>
+          <p:nvPr>
+            <p:ph type="body" idx="1"/>
+          </p:nvPr>
+        </p:nvSpPr>
+        <p:spPr/>
+        <p:txBody>
+          <a:bodyPr/>
+          <a:lstStyle/>
+          <a:p>
+            <a:endParaRPr lang="he-IL"/>
+          </a:p>
+        </p:txBody>
+      </p:sp>
+    </p:spTree>
+    <p:extLst>
+      <p:ext uri="{BB962C8B-B14F-4D97-AF65-F5344CB8AC3E}">
+        <p14:creationId xmlns:p14="http://schemas.microsoft.com/office/powerpoint/2010/main" val="2590730318"/>
       </p:ext>
     </p:extLst>
   </p:cSld>
